--- a/Git training beginners.pptx
+++ b/Git training beginners.pptx
@@ -390,7 +390,7 @@
           <a:p>
             <a:fld id="{764FE745-3EB9-B747-A5C2-264BEDC4326C}" type="datetimeFigureOut">
               <a:rPr lang="nl-NL" smtClean="0"/>
-              <a:t>8-11-2023</a:t>
+              <a:t>4-2-2026</a:t>
             </a:fld>
             <a:endParaRPr lang="nl-NL"/>
           </a:p>
@@ -567,7 +567,7 @@
           <a:p>
             <a:fld id="{9D779F7C-DAE7-9B4B-9AA6-E1EA6E6A4BB5}" type="datetimeFigureOut">
               <a:rPr lang="nl-NL" smtClean="0"/>
-              <a:t>8-11-2023</a:t>
+              <a:t>4-2-2026</a:t>
             </a:fld>
             <a:endParaRPr lang="nl-NL"/>
           </a:p>
@@ -19193,7 +19193,7 @@
           <a:p>
             <a:fld id="{5FBADB5E-39C7-264C-8A26-E97BA5DD03CB}" type="datetimeFigureOut">
               <a:rPr lang="nl-NL" smtClean="0"/>
-              <a:t>8-11-2023</a:t>
+              <a:t>4-2-2026</a:t>
             </a:fld>
             <a:endParaRPr lang="nl-NL"/>
           </a:p>
@@ -21538,9 +21538,16 @@
             <p:ph type="title"/>
           </p:nvPr>
         </p:nvSpPr>
-        <p:spPr/>
+        <p:spPr>
+          <a:xfrm>
+            <a:off x="838200" y="0"/>
+            <a:ext cx="10515600" cy="1024702"/>
+          </a:xfrm>
+        </p:spPr>
         <p:txBody>
-          <a:bodyPr/>
+          <a:bodyPr anchor="ctr">
+            <a:normAutofit/>
+          </a:bodyPr>
           <a:lstStyle/>
           <a:p>
             <a:r>
@@ -21567,9 +21574,16 @@
             <p:ph idx="1"/>
           </p:nvPr>
         </p:nvSpPr>
-        <p:spPr/>
+        <p:spPr>
+          <a:xfrm>
+            <a:off x="838200" y="1825625"/>
+            <a:ext cx="7227570" cy="4351338"/>
+          </a:xfrm>
+        </p:spPr>
         <p:txBody>
-          <a:bodyPr/>
+          <a:bodyPr>
+            <a:normAutofit/>
+          </a:bodyPr>
           <a:lstStyle/>
           <a:p>
             <a:r>
@@ -21642,10 +21656,10 @@
       </p:sp>
       <p:pic>
         <p:nvPicPr>
-          <p:cNvPr id="1026" name="Picture 2" descr="A realistic photorealistic image of a dutch astronaut saluting the dutch flag while the moonlander stands in the background.">
+          <p:cNvPr id="4" name="Picture 2" descr="After Years of Abusive E-mails, the Creator of Linux Steps Aside | The New  Yorker">
             <a:extLst>
               <a:ext uri="{FF2B5EF4-FFF2-40B4-BE49-F238E27FC236}">
-                <a16:creationId xmlns:a16="http://schemas.microsoft.com/office/drawing/2014/main" id="{97A5F09D-523B-E695-AD2F-5B11FB35F7F6}"/>
+                <a16:creationId xmlns:a16="http://schemas.microsoft.com/office/drawing/2014/main" id="{7B2342A0-897E-78C9-D7AA-C7F33E22E342}"/>
               </a:ext>
             </a:extLst>
           </p:cNvPr>
@@ -21662,20 +21676,22 @@
               </a:ext>
             </a:extLst>
           </a:blip>
-          <a:srcRect/>
+          <a:srcRect l="21237" r="33738"/>
           <a:stretch>
             <a:fillRect/>
           </a:stretch>
         </p:blipFill>
         <p:spPr bwMode="auto">
           <a:xfrm>
-            <a:off x="7020515" y="1108362"/>
-            <a:ext cx="5068601" cy="5068601"/>
+            <a:off x="8256270" y="1825625"/>
+            <a:ext cx="3097529" cy="4351338"/>
           </a:xfrm>
           <a:prstGeom prst="rect">
             <a:avLst/>
           </a:prstGeom>
-          <a:noFill/>
+          <a:solidFill>
+            <a:srgbClr val="FFFFFF"/>
+          </a:solidFill>
           <a:extLst>
             <a:ext uri="{909E8E84-426E-40DD-AFC4-6F175D3DCCD1}">
               <a14:hiddenFill xmlns:a14="http://schemas.microsoft.com/office/drawing/2010/main">
@@ -23930,15 +23946,6 @@
 </file>
 
 <file path=customXml/item1.xml><?xml version="1.0" encoding="utf-8"?>
-<?mso-contentType ?>
-<FormTemplates xmlns="http://schemas.microsoft.com/sharepoint/v3/contenttype/forms">
-  <Display>DocumentLibraryForm</Display>
-  <Edit>DocumentLibraryForm</Edit>
-  <New>DocumentLibraryForm</New>
-</FormTemplates>
-</file>
-
-<file path=customXml/item2.xml><?xml version="1.0" encoding="utf-8"?>
 <p:properties xmlns:p="http://schemas.microsoft.com/office/2006/metadata/properties" xmlns:xsi="http://www.w3.org/2001/XMLSchema-instance" xmlns:pc="http://schemas.microsoft.com/office/infopath/2007/PartnerControls">
   <documentManagement>
     <TaxCatchAll xmlns="b2f4e6c2-c2d1-439b-b8d5-6c60b7480bb7" xsi:nil="true"/>
@@ -23964,6 +23971,15 @@
     </SharedWithUsers>
   </documentManagement>
 </p:properties>
+</file>
+
+<file path=customXml/item2.xml><?xml version="1.0" encoding="utf-8"?>
+<?mso-contentType ?>
+<FormTemplates xmlns="http://schemas.microsoft.com/sharepoint/v3/contenttype/forms">
+  <Display>DocumentLibraryForm</Display>
+  <Edit>DocumentLibraryForm</Edit>
+  <New>DocumentLibraryForm</New>
+</FormTemplates>
 </file>
 
 <file path=customXml/item3.xml><?xml version="1.0" encoding="utf-8"?>
@@ -24210,14 +24226,6 @@
 </file>
 
 <file path=customXml/itemProps1.xml><?xml version="1.0" encoding="utf-8"?>
-<ds:datastoreItem xmlns:ds="http://schemas.openxmlformats.org/officeDocument/2006/customXml" ds:itemID="{83063191-8A48-4036-94E1-00717E3E7DB8}">
-  <ds:schemaRefs>
-    <ds:schemaRef ds:uri="http://schemas.microsoft.com/sharepoint/v3/contenttype/forms"/>
-  </ds:schemaRefs>
-</ds:datastoreItem>
-</file>
-
-<file path=customXml/itemProps2.xml><?xml version="1.0" encoding="utf-8"?>
 <ds:datastoreItem xmlns:ds="http://schemas.openxmlformats.org/officeDocument/2006/customXml" ds:itemID="{D64FB15A-1AB9-494D-BA7A-B6E719D463AC}">
   <ds:schemaRefs>
     <ds:schemaRef ds:uri="http://www.w3.org/XML/1998/namespace"/>
@@ -24234,6 +24242,14 @@
     <ds:schemaRef ds:uri="02719700-d428-42a5-ac68-80dcf95a526e"/>
     <ds:schemaRef ds:uri="b2f4e6c2-c2d1-439b-b8d5-6c60b7480bb7"/>
     <ds:schemaRef ds:uri="62075bfc-fb2b-4978-b33a-2ee515c6b2cc"/>
+  </ds:schemaRefs>
+</ds:datastoreItem>
+</file>
+
+<file path=customXml/itemProps2.xml><?xml version="1.0" encoding="utf-8"?>
+<ds:datastoreItem xmlns:ds="http://schemas.openxmlformats.org/officeDocument/2006/customXml" ds:itemID="{83063191-8A48-4036-94E1-00717E3E7DB8}">
+  <ds:schemaRefs>
+    <ds:schemaRef ds:uri="http://schemas.microsoft.com/sharepoint/v3/contenttype/forms"/>
   </ds:schemaRefs>
 </ds:datastoreItem>
 </file>
